--- a/InfoSec/CIS 115 Week 3.pptx
+++ b/InfoSec/CIS 115 Week 3.pptx
@@ -14,6 +14,7 @@
     <p:sldId id="259" r:id="rId5"/>
     <p:sldId id="260" r:id="rId6"/>
     <p:sldId id="261" r:id="rId7"/>
+    <p:sldId id="271" r:id="rId24"/>
     <p:sldId id="270" r:id="rId8"/>
     <p:sldId id="262" r:id="rId9"/>
     <p:sldId id="263" r:id="rId10"/>
@@ -135,6 +136,35 @@
     <p1510:client id="{FFEC0749-2CC2-4804-A71B-CF83BE330F6A}" v="3" dt="2023-09-27T15:29:30.334"/>
   </p1510:revLst>
 </p1510:revInfo>
+</file>
+
+<file path=ppt/changesInfos/changesInfo1.xml><?xml version="1.0" encoding="utf-8"?>
+<pc:chgInfo xmlns:a="http://schemas.openxmlformats.org/drawingml/2006/main" xmlns:r="http://schemas.openxmlformats.org/officeDocument/2006/relationships" xmlns:ac="http://schemas.microsoft.com/office/drawing/2013/main/command" xmlns:pc="http://schemas.microsoft.com/office/powerpoint/2013/main/command">
+  <pc:docChgLst>
+    <pc:chgData name="Adrianna Holden-Gouveia" userId="8de7044ed950bdf3" providerId="Windows Live" clId="Web-{FFEC0749-2CC2-4804-A71B-CF83BE330F6A}"/>
+    <pc:docChg chg="modSld">
+      <pc:chgData name="Adrianna Holden-Gouveia" userId="8de7044ed950bdf3" providerId="Windows Live" clId="Web-{FFEC0749-2CC2-4804-A71B-CF83BE330F6A}" dt="2023-09-27T15:29:30.334" v="2" actId="20577"/>
+      <pc:docMkLst>
+        <pc:docMk/>
+      </pc:docMkLst>
+      <pc:sldChg chg="modSp">
+        <pc:chgData name="Adrianna Holden-Gouveia" userId="8de7044ed950bdf3" providerId="Windows Live" clId="Web-{FFEC0749-2CC2-4804-A71B-CF83BE330F6A}" dt="2023-09-27T15:29:30.334" v="2" actId="20577"/>
+        <pc:sldMkLst>
+          <pc:docMk/>
+          <pc:sldMk cId="3716639140" sldId="264"/>
+        </pc:sldMkLst>
+        <pc:spChg chg="mod">
+          <ac:chgData name="Adrianna Holden-Gouveia" userId="8de7044ed950bdf3" providerId="Windows Live" clId="Web-{FFEC0749-2CC2-4804-A71B-CF83BE330F6A}" dt="2023-09-27T15:29:30.334" v="2" actId="20577"/>
+          <ac:spMkLst>
+            <pc:docMk/>
+            <pc:sldMk cId="3716639140" sldId="264"/>
+            <ac:spMk id="3" creationId="{A7175041-3C49-DC42-9A0D-B30B4680F7D0}"/>
+          </ac:spMkLst>
+        </pc:spChg>
+      </pc:sldChg>
+    </pc:docChg>
+  </pc:docChgLst>
+</pc:chgInfo>
 </file>
 
 <file path=ppt/notesMasters/notesMaster1.xml><?xml version="1.0" encoding="utf-8"?>
@@ -6457,6 +6487,134 @@
           <p:cNvPr id="2" name="Title 1">
             <a:extLst>
               <a:ext uri="{FF2B5EF4-FFF2-40B4-BE49-F238E27FC236}">
+                <a16:creationId xmlns:a16="http://schemas.microsoft.com/office/drawing/2014/main" id="{1FEDF4E8-FFC3-6049-8DD5-8BB85CFA9C49}"/>
+              </a:ext>
+            </a:extLst>
+          </p:cNvPr>
+          <p:cNvSpPr>
+            <a:spLocks noGrp="1"/>
+          </p:cNvSpPr>
+          <p:nvPr>
+            <p:ph type="title"/>
+          </p:nvPr>
+        </p:nvSpPr>
+        <p:spPr/>
+        <p:txBody>
+          <a:bodyPr/>
+          <a:lstStyle/>
+          <a:p>
+            <a:r>
+              <a:rPr lang="en-US"/>
+              <a:t>Email </a:t>
+            </a:r>
+          </a:p>
+        </p:txBody>
+      </p:sp>
+      <p:sp>
+        <p:nvSpPr>
+          <p:cNvPr id="3" name="Content Placeholder 2">
+            <a:extLst>
+              <a:ext uri="{FF2B5EF4-FFF2-40B4-BE49-F238E27FC236}">
+                <a16:creationId xmlns:a16="http://schemas.microsoft.com/office/drawing/2014/main" id="{164ADE41-72BC-F643-BDA1-4E0AD3639E90}"/>
+              </a:ext>
+            </a:extLst>
+          </p:cNvPr>
+          <p:cNvSpPr>
+            <a:spLocks noGrp="1"/>
+          </p:cNvSpPr>
+          <p:nvPr>
+            <p:ph idx="1"/>
+          </p:nvPr>
+        </p:nvSpPr>
+        <p:spPr/>
+        <p:txBody>
+          <a:bodyPr/>
+          <a:lstStyle/>
+          <a:p>
+            <a:r>
+              <a:rPr lang="en-US" dirty="0"/>
+              <a:t>Chain mail</a:t>
+            </a:r>
+          </a:p>
+          <a:p>
+            <a:r>
+              <a:rPr lang="en-US" dirty="0"/>
+              <a:t>Embedded links</a:t>
+            </a:r>
+          </a:p>
+          <a:p>
+            <a:r>
+              <a:rPr lang="en-US" dirty="0"/>
+              <a:t>Spam</a:t>
+            </a:r>
+          </a:p>
+          <a:p>
+            <a:r>
+              <a:rPr lang="en-US" dirty="0"/>
+              <a:t>Phishing </a:t>
+            </a:r>
+          </a:p>
+        </p:txBody>
+      </p:sp>
+      <p:pic>
+        <p:nvPicPr>
+          <p:cNvPr id="4" name="Picture 3" descr="Dr Zoidburg says your email is bad and you should feel bad" title="meme futurama"/>
+          <p:cNvPicPr>
+            <a:picLocks noChangeAspect="1"/>
+          </p:cNvPicPr>
+          <p:nvPr/>
+        </p:nvPicPr>
+        <p:blipFill>
+          <a:blip r:embed="rId2"/>
+          <a:stretch>
+            <a:fillRect/>
+          </a:stretch>
+        </p:blipFill>
+        <p:spPr>
+          <a:xfrm>
+            <a:off x="5348472" y="2474258"/>
+            <a:ext cx="5038725" cy="3352800"/>
+          </a:xfrm>
+          <a:prstGeom prst="rect">
+            <a:avLst/>
+          </a:prstGeom>
+        </p:spPr>
+      </p:pic>
+    </p:spTree>
+    <p:extLst>
+      <p:ext uri="{BB962C8B-B14F-4D97-AF65-F5344CB8AC3E}">
+        <p14:creationId xmlns:p14="http://schemas.microsoft.com/office/powerpoint/2010/main" val="1206667593"/>
+      </p:ext>
+    </p:extLst>
+  </p:cSld>
+  <p:clrMapOvr>
+    <a:masterClrMapping/>
+  </p:clrMapOvr>
+</p:sld>
+</file>
+
+<file path=ppt/slides/slide11.xml><?xml version="1.0" encoding="utf-8"?>
+<p:sld xmlns:a="http://schemas.openxmlformats.org/drawingml/2006/main" xmlns:r="http://schemas.openxmlformats.org/officeDocument/2006/relationships" xmlns:p="http://schemas.openxmlformats.org/presentationml/2006/main">
+  <p:cSld>
+    <p:spTree>
+      <p:nvGrpSpPr>
+        <p:cNvPr id="1" name=""/>
+        <p:cNvGrpSpPr/>
+        <p:nvPr/>
+      </p:nvGrpSpPr>
+      <p:grpSpPr>
+        <a:xfrm>
+          <a:off x="0" y="0"/>
+          <a:ext cx="0" cy="0"/>
+          <a:chOff x="0" y="0"/>
+          <a:chExt cx="0" cy="0"/>
+        </a:xfrm>
+      </p:grpSpPr>
+      <p:sp>
+        <p:nvSpPr>
+          <p:cNvPr id="2" name="Title 1">
+            <a:extLst>
+              <a:ext uri="{FF2B5EF4-FFF2-40B4-BE49-F238E27FC236}">
                 <a16:creationId xmlns:a16="http://schemas.microsoft.com/office/drawing/2014/main" id="{4287AA2A-FC08-B84B-943F-185512753E53}"/>
               </a:ext>
             </a:extLst>
@@ -6570,7 +6728,7 @@
 </p:sld>
 </file>
 
-<file path=ppt/slides/slide11.xml><?xml version="1.0" encoding="utf-8"?>
+<file path=ppt/slides/slide12.xml><?xml version="1.0" encoding="utf-8"?>
 <p:sld xmlns:a="http://schemas.openxmlformats.org/drawingml/2006/main" xmlns:r="http://schemas.openxmlformats.org/officeDocument/2006/relationships" xmlns:p="http://schemas.openxmlformats.org/presentationml/2006/main">
   <p:cSld>
     <p:spTree>
@@ -6692,7 +6850,7 @@
 </p:sld>
 </file>
 
-<file path=ppt/slides/slide12.xml><?xml version="1.0" encoding="utf-8"?>
+<file path=ppt/slides/slide13.xml><?xml version="1.0" encoding="utf-8"?>
 <p:sld xmlns:a="http://schemas.openxmlformats.org/drawingml/2006/main" xmlns:r="http://schemas.openxmlformats.org/officeDocument/2006/relationships" xmlns:p="http://schemas.openxmlformats.org/presentationml/2006/main">
   <p:cSld>
     <p:spTree>
@@ -6822,134 +6980,6 @@
 </p:sld>
 </file>
 
-<file path=ppt/slides/slide13.xml><?xml version="1.0" encoding="utf-8"?>
-<p:sld xmlns:a="http://schemas.openxmlformats.org/drawingml/2006/main" xmlns:r="http://schemas.openxmlformats.org/officeDocument/2006/relationships" xmlns:p="http://schemas.openxmlformats.org/presentationml/2006/main">
-  <p:cSld>
-    <p:spTree>
-      <p:nvGrpSpPr>
-        <p:cNvPr id="1" name=""/>
-        <p:cNvGrpSpPr/>
-        <p:nvPr/>
-      </p:nvGrpSpPr>
-      <p:grpSpPr>
-        <a:xfrm>
-          <a:off x="0" y="0"/>
-          <a:ext cx="0" cy="0"/>
-          <a:chOff x="0" y="0"/>
-          <a:chExt cx="0" cy="0"/>
-        </a:xfrm>
-      </p:grpSpPr>
-      <p:sp>
-        <p:nvSpPr>
-          <p:cNvPr id="2" name="Title 1">
-            <a:extLst>
-              <a:ext uri="{FF2B5EF4-FFF2-40B4-BE49-F238E27FC236}">
-                <a16:creationId xmlns:a16="http://schemas.microsoft.com/office/drawing/2014/main" id="{5CB6CC79-44BD-3A4C-94B3-DE94CD0B87F3}"/>
-              </a:ext>
-            </a:extLst>
-          </p:cNvPr>
-          <p:cNvSpPr>
-            <a:spLocks noGrp="1"/>
-          </p:cNvSpPr>
-          <p:nvPr>
-            <p:ph type="title"/>
-          </p:nvPr>
-        </p:nvSpPr>
-        <p:spPr/>
-        <p:txBody>
-          <a:bodyPr/>
-          <a:lstStyle/>
-          <a:p>
-            <a:r>
-              <a:rPr lang="en-US"/>
-              <a:t>Vulnerabilities: zero day expoilts</a:t>
-            </a:r>
-          </a:p>
-        </p:txBody>
-      </p:sp>
-      <p:sp>
-        <p:nvSpPr>
-          <p:cNvPr id="3" name="Content Placeholder 2">
-            <a:extLst>
-              <a:ext uri="{FF2B5EF4-FFF2-40B4-BE49-F238E27FC236}">
-                <a16:creationId xmlns:a16="http://schemas.microsoft.com/office/drawing/2014/main" id="{55824C2B-847B-3D49-8802-BA08A9B96D71}"/>
-              </a:ext>
-            </a:extLst>
-          </p:cNvPr>
-          <p:cNvSpPr>
-            <a:spLocks noGrp="1"/>
-          </p:cNvSpPr>
-          <p:nvPr>
-            <p:ph idx="1"/>
-          </p:nvPr>
-        </p:nvSpPr>
-        <p:spPr/>
-        <p:txBody>
-          <a:bodyPr/>
-          <a:lstStyle/>
-          <a:p>
-            <a:r>
-              <a:rPr lang="en-US" dirty="0"/>
-              <a:t>Window of vulnerability</a:t>
-            </a:r>
-          </a:p>
-          <a:p>
-            <a:r>
-              <a:rPr lang="en-US" dirty="0" err="1"/>
-              <a:t>Zeroday</a:t>
-            </a:r>
-            <a:r>
-              <a:rPr lang="en-US" dirty="0"/>
-              <a:t> emergency response team (ZERT)</a:t>
-            </a:r>
-          </a:p>
-          <a:p>
-            <a:pPr lvl="1"/>
-            <a:r>
-              <a:rPr lang="en-US" dirty="0"/>
-              <a:t>Non vendor patches</a:t>
-            </a:r>
-          </a:p>
-          <a:p>
-            <a:r>
-              <a:rPr lang="en-US" dirty="0"/>
-              <a:t>Selling </a:t>
-            </a:r>
-            <a:r>
-              <a:rPr lang="en-US" dirty="0" err="1"/>
-              <a:t>zeroday</a:t>
-            </a:r>
-            <a:r>
-              <a:rPr lang="en-US" dirty="0"/>
-              <a:t> exploits</a:t>
-            </a:r>
-          </a:p>
-          <a:p>
-            <a:pPr lvl="1"/>
-            <a:r>
-              <a:rPr lang="en-US" dirty="0"/>
-              <a:t>Ethics!</a:t>
-            </a:r>
-          </a:p>
-          <a:p>
-            <a:pPr lvl="1"/>
-            <a:endParaRPr lang="en-US" dirty="0"/>
-          </a:p>
-        </p:txBody>
-      </p:sp>
-    </p:spTree>
-    <p:extLst>
-      <p:ext uri="{BB962C8B-B14F-4D97-AF65-F5344CB8AC3E}">
-        <p14:creationId xmlns:p14="http://schemas.microsoft.com/office/powerpoint/2010/main" val="531819099"/>
-      </p:ext>
-    </p:extLst>
-  </p:cSld>
-  <p:clrMapOvr>
-    <a:masterClrMapping/>
-  </p:clrMapOvr>
-</p:sld>
-</file>
-
 <file path=ppt/slides/slide14.xml><?xml version="1.0" encoding="utf-8"?>
 <p:sld xmlns:a="http://schemas.openxmlformats.org/drawingml/2006/main" xmlns:r="http://schemas.openxmlformats.org/officeDocument/2006/relationships" xmlns:p="http://schemas.openxmlformats.org/presentationml/2006/main">
   <p:cSld>
@@ -6972,6 +7002,134 @@
           <p:cNvPr id="2" name="Title 1">
             <a:extLst>
               <a:ext uri="{FF2B5EF4-FFF2-40B4-BE49-F238E27FC236}">
+                <a16:creationId xmlns:a16="http://schemas.microsoft.com/office/drawing/2014/main" id="{5CB6CC79-44BD-3A4C-94B3-DE94CD0B87F3}"/>
+              </a:ext>
+            </a:extLst>
+          </p:cNvPr>
+          <p:cNvSpPr>
+            <a:spLocks noGrp="1"/>
+          </p:cNvSpPr>
+          <p:nvPr>
+            <p:ph type="title"/>
+          </p:nvPr>
+        </p:nvSpPr>
+        <p:spPr/>
+        <p:txBody>
+          <a:bodyPr/>
+          <a:lstStyle/>
+          <a:p>
+            <a:r>
+              <a:rPr lang="en-US"/>
+              <a:t>Vulnerabilities: zero day exploits</a:t>
+            </a:r>
+          </a:p>
+        </p:txBody>
+      </p:sp>
+      <p:sp>
+        <p:nvSpPr>
+          <p:cNvPr id="3" name="Content Placeholder 2">
+            <a:extLst>
+              <a:ext uri="{FF2B5EF4-FFF2-40B4-BE49-F238E27FC236}">
+                <a16:creationId xmlns:a16="http://schemas.microsoft.com/office/drawing/2014/main" id="{55824C2B-847B-3D49-8802-BA08A9B96D71}"/>
+              </a:ext>
+            </a:extLst>
+          </p:cNvPr>
+          <p:cNvSpPr>
+            <a:spLocks noGrp="1"/>
+          </p:cNvSpPr>
+          <p:nvPr>
+            <p:ph idx="1"/>
+          </p:nvPr>
+        </p:nvSpPr>
+        <p:spPr/>
+        <p:txBody>
+          <a:bodyPr/>
+          <a:lstStyle/>
+          <a:p>
+            <a:r>
+              <a:rPr lang="en-US" dirty="0"/>
+              <a:t>Window of vulnerability</a:t>
+            </a:r>
+          </a:p>
+          <a:p>
+            <a:r>
+              <a:rPr lang="en-US" dirty="0" err="1"/>
+              <a:t>Zeroday</a:t>
+            </a:r>
+            <a:r>
+              <a:rPr lang="en-US" dirty="0"/>
+              <a:t> emergency response team (ZERT)</a:t>
+            </a:r>
+          </a:p>
+          <a:p>
+            <a:pPr lvl="1"/>
+            <a:r>
+              <a:rPr lang="en-US" dirty="0"/>
+              <a:t>Non vendor patches</a:t>
+            </a:r>
+          </a:p>
+          <a:p>
+            <a:r>
+              <a:rPr lang="en-US" dirty="0"/>
+              <a:t>Selling </a:t>
+            </a:r>
+            <a:r>
+              <a:rPr lang="en-US" dirty="0" err="1"/>
+              <a:t>zeroday</a:t>
+            </a:r>
+            <a:r>
+              <a:rPr lang="en-US" dirty="0"/>
+              <a:t> exploits</a:t>
+            </a:r>
+          </a:p>
+          <a:p>
+            <a:pPr lvl="1"/>
+            <a:r>
+              <a:rPr lang="en-US" dirty="0"/>
+              <a:t>Ethics!</a:t>
+            </a:r>
+          </a:p>
+          <a:p>
+            <a:pPr lvl="1"/>
+            <a:endParaRPr lang="en-US" dirty="0"/>
+          </a:p>
+        </p:txBody>
+      </p:sp>
+    </p:spTree>
+    <p:extLst>
+      <p:ext uri="{BB962C8B-B14F-4D97-AF65-F5344CB8AC3E}">
+        <p14:creationId xmlns:p14="http://schemas.microsoft.com/office/powerpoint/2010/main" val="531819099"/>
+      </p:ext>
+    </p:extLst>
+  </p:cSld>
+  <p:clrMapOvr>
+    <a:masterClrMapping/>
+  </p:clrMapOvr>
+</p:sld>
+</file>
+
+<file path=ppt/slides/slide15.xml><?xml version="1.0" encoding="utf-8"?>
+<p:sld xmlns:a="http://schemas.openxmlformats.org/drawingml/2006/main" xmlns:r="http://schemas.openxmlformats.org/officeDocument/2006/relationships" xmlns:p="http://schemas.openxmlformats.org/presentationml/2006/main">
+  <p:cSld>
+    <p:spTree>
+      <p:nvGrpSpPr>
+        <p:cNvPr id="1" name=""/>
+        <p:cNvGrpSpPr/>
+        <p:nvPr/>
+      </p:nvGrpSpPr>
+      <p:grpSpPr>
+        <a:xfrm>
+          <a:off x="0" y="0"/>
+          <a:ext cx="0" cy="0"/>
+          <a:chOff x="0" y="0"/>
+          <a:chExt cx="0" cy="0"/>
+        </a:xfrm>
+      </p:grpSpPr>
+      <p:sp>
+        <p:nvSpPr>
+          <p:cNvPr id="2" name="Title 1">
+            <a:extLst>
+              <a:ext uri="{FF2B5EF4-FFF2-40B4-BE49-F238E27FC236}">
                 <a16:creationId xmlns:a16="http://schemas.microsoft.com/office/drawing/2014/main" id="{3BC00F62-4D85-D048-ABEF-DD58F34F74D4}"/>
               </a:ext>
             </a:extLst>
@@ -7051,7 +7209,7 @@
 </p:sld>
 </file>
 
-<file path=ppt/slides/slide15.xml><?xml version="1.0" encoding="utf-8"?>
+<file path=ppt/slides/slide16.xml><?xml version="1.0" encoding="utf-8"?>
 <p:sld xmlns:a="http://schemas.openxmlformats.org/drawingml/2006/main" xmlns:r="http://schemas.openxmlformats.org/officeDocument/2006/relationships" xmlns:p="http://schemas.openxmlformats.org/presentationml/2006/main">
   <p:cSld>
     <p:spTree>
@@ -7747,6 +7905,108 @@
 </file>
 
 <file path=ppt/slides/slide7.xml><?xml version="1.0" encoding="utf-8"?>
+<p:sld xmlns:a="http://schemas.openxmlformats.org/drawingml/2006/main" xmlns:p="http://schemas.openxmlformats.org/presentationml/2006/main" xmlns:r="http://schemas.openxmlformats.org/officeDocument/2006/relationships">
+  <p:cSld>
+    <p:spTree>
+      <p:nvGrpSpPr>
+        <p:cNvPr id="1" name=""/>
+        <p:cNvGrpSpPr/>
+        <p:nvPr/>
+      </p:nvGrpSpPr>
+      <p:grpSpPr/>
+      <p:sp>
+        <p:nvSpPr>
+          <p:cNvPr id="2" name="Title 1"/>
+          <p:cNvSpPr>
+            <a:spLocks noGrp="1"/>
+          </p:cNvSpPr>
+          <p:nvPr>
+            <p:ph type="title"/>
+          </p:nvPr>
+        </p:nvSpPr>
+        <p:spPr/>
+        <p:txBody>
+          <a:bodyPr/>
+          <a:lstStyle/>
+          <a:p>
+            <a:r>
+              <a:rPr/>
+              <a:t>Malware in AI Models</a:t>
+            </a:r>
+          </a:p>
+        </p:txBody>
+      </p:sp>
+      <p:sp>
+        <p:nvSpPr>
+          <p:cNvPr id="3" name="Content Placeholder 2"/>
+          <p:cNvSpPr>
+            <a:spLocks noGrp="1"/>
+          </p:cNvSpPr>
+          <p:nvPr>
+            <p:ph idx="1"/>
+          </p:nvPr>
+        </p:nvSpPr>
+        <p:spPr/>
+        <p:txBody>
+          <a:bodyPr wrap="square"/>
+          <a:lstStyle/>
+          <a:p>
+            <a:pPr/>
+            <a:r>
+              <a:rPr sz="2000"/>
+              <a:t>AI models are software: downloading a model can run code on your computer</a:t>
+            </a:r>
+          </a:p>
+          <a:p>
+            <a:pPr/>
+            <a:r>
+              <a:rPr sz="2000"/>
+              <a:t>Attackers upload booby-trapped models to sites like Hugging Face, some hiding code in "pickle" model files</a:t>
+            </a:r>
+          </a:p>
+          <a:p>
+            <a:pPr lvl="1"/>
+            <a:r>
+              <a:rPr sz="1600">
+                <a:hlinkClick r:id="rId2"/>
+              </a:rPr>
+              <a:t>Source: BleepingComputer</a:t>
+            </a:r>
+          </a:p>
+          <a:p>
+            <a:pPr/>
+            <a:r>
+              <a:rPr sz="2000"/>
+              <a:t>A fake "OpenAI release" on Hugging Face spread password-stealing malware, with 244,000 downloads before it was removed</a:t>
+            </a:r>
+          </a:p>
+          <a:p>
+            <a:pPr lvl="1"/>
+            <a:r>
+              <a:rPr sz="1600">
+                <a:hlinkClick r:id="rId3"/>
+              </a:rPr>
+              <a:t>Source: BleepingComputer</a:t>
+            </a:r>
+          </a:p>
+          <a:p>
+            <a:pPr/>
+            <a:r>
+              <a:rPr sz="2000"/>
+              <a:t>Only download models from verified publishers, and scan them before use</a:t>
+            </a:r>
+          </a:p>
+        </p:txBody>
+      </p:sp>
+    </p:spTree>
+  </p:cSld>
+  <p:clrMapOvr>
+    <a:masterClrMapping/>
+  </p:clrMapOvr>
+</p:sld>
+</file>
+
+<file path=ppt/slides/slide8.xml><?xml version="1.0" encoding="utf-8"?>
 <p:sld xmlns:a="http://schemas.openxmlformats.org/drawingml/2006/main" xmlns:r="http://schemas.openxmlformats.org/officeDocument/2006/relationships" xmlns:p="http://schemas.openxmlformats.org/presentationml/2006/main">
   <p:cSld>
     <p:spTree>
@@ -7871,121 +8131,6 @@
 </p:sld>
 </file>
 
-<file path=ppt/slides/slide8.xml><?xml version="1.0" encoding="utf-8"?>
-<p:sld xmlns:a="http://schemas.openxmlformats.org/drawingml/2006/main" xmlns:r="http://schemas.openxmlformats.org/officeDocument/2006/relationships" xmlns:p="http://schemas.openxmlformats.org/presentationml/2006/main">
-  <p:cSld>
-    <p:spTree>
-      <p:nvGrpSpPr>
-        <p:cNvPr id="1" name=""/>
-        <p:cNvGrpSpPr/>
-        <p:nvPr/>
-      </p:nvGrpSpPr>
-      <p:grpSpPr>
-        <a:xfrm>
-          <a:off x="0" y="0"/>
-          <a:ext cx="0" cy="0"/>
-          <a:chOff x="0" y="0"/>
-          <a:chExt cx="0" cy="0"/>
-        </a:xfrm>
-      </p:grpSpPr>
-      <p:sp>
-        <p:nvSpPr>
-          <p:cNvPr id="2" name="Title 1">
-            <a:extLst>
-              <a:ext uri="{FF2B5EF4-FFF2-40B4-BE49-F238E27FC236}">
-                <a16:creationId xmlns:a16="http://schemas.microsoft.com/office/drawing/2014/main" id="{1B3E0567-9FB0-844E-AA76-08275B0694A7}"/>
-              </a:ext>
-            </a:extLst>
-          </p:cNvPr>
-          <p:cNvSpPr>
-            <a:spLocks noGrp="1"/>
-          </p:cNvSpPr>
-          <p:nvPr>
-            <p:ph type="title"/>
-          </p:nvPr>
-        </p:nvSpPr>
-        <p:spPr/>
-        <p:txBody>
-          <a:bodyPr/>
-          <a:lstStyle/>
-          <a:p>
-            <a:r>
-              <a:rPr lang="en-US"/>
-              <a:t>Honeypots</a:t>
-            </a:r>
-          </a:p>
-        </p:txBody>
-      </p:sp>
-      <p:sp>
-        <p:nvSpPr>
-          <p:cNvPr id="3" name="Content Placeholder 2" descr="Links to Honeypot Examples" title="Links to Honeypot Examples">
-            <a:extLst>
-              <a:ext uri="{FF2B5EF4-FFF2-40B4-BE49-F238E27FC236}">
-                <a16:creationId xmlns:a16="http://schemas.microsoft.com/office/drawing/2014/main" id="{ADD48C3F-32F9-DA4B-928E-139F8F8DEE21}"/>
-              </a:ext>
-            </a:extLst>
-          </p:cNvPr>
-          <p:cNvSpPr>
-            <a:spLocks noGrp="1"/>
-          </p:cNvSpPr>
-          <p:nvPr>
-            <p:ph idx="1"/>
-          </p:nvPr>
-        </p:nvSpPr>
-        <p:spPr>
-          <a:xfrm>
-            <a:off x="1104293" y="2052918"/>
-            <a:ext cx="8946541" cy="4195481"/>
-          </a:xfrm>
-        </p:spPr>
-        <p:txBody>
-          <a:bodyPr/>
-          <a:lstStyle/>
-          <a:p>
-            <a:r>
-              <a:rPr lang="en-US" dirty="0">
-                <a:hlinkClick r:id="rId2"/>
-              </a:rPr>
-              <a:t>http://www.fireeye.com/cyber-map/threat-map.html</a:t>
-            </a:r>
-            <a:endParaRPr lang="en-US" dirty="0"/>
-          </a:p>
-          <a:p>
-            <a:r>
-              <a:rPr lang="en-US" dirty="0">
-                <a:hlinkClick r:id="rId3"/>
-              </a:rPr>
-              <a:t>http://map.honeynet.org</a:t>
-            </a:r>
-            <a:endParaRPr lang="en-US" dirty="0"/>
-          </a:p>
-          <a:p>
-            <a:r>
-              <a:rPr lang="en-US" dirty="0">
-                <a:hlinkClick r:id="rId4"/>
-              </a:rPr>
-              <a:t>http://hp.ipviking.com</a:t>
-            </a:r>
-            <a:endParaRPr lang="en-US" dirty="0"/>
-          </a:p>
-          <a:p>
-            <a:endParaRPr lang="en-US" dirty="0"/>
-          </a:p>
-        </p:txBody>
-      </p:sp>
-    </p:spTree>
-    <p:extLst>
-      <p:ext uri="{BB962C8B-B14F-4D97-AF65-F5344CB8AC3E}">
-        <p14:creationId xmlns:p14="http://schemas.microsoft.com/office/powerpoint/2010/main" val="1398688906"/>
-      </p:ext>
-    </p:extLst>
-  </p:cSld>
-  <p:clrMapOvr>
-    <a:masterClrMapping/>
-  </p:clrMapOvr>
-</p:sld>
-</file>
-
 <file path=ppt/slides/slide9.xml><?xml version="1.0" encoding="utf-8"?>
 <p:sld xmlns:a="http://schemas.openxmlformats.org/drawingml/2006/main" xmlns:r="http://schemas.openxmlformats.org/officeDocument/2006/relationships" xmlns:p="http://schemas.openxmlformats.org/presentationml/2006/main">
   <p:cSld>
@@ -8008,7 +8153,7 @@
           <p:cNvPr id="2" name="Title 1">
             <a:extLst>
               <a:ext uri="{FF2B5EF4-FFF2-40B4-BE49-F238E27FC236}">
-                <a16:creationId xmlns:a16="http://schemas.microsoft.com/office/drawing/2014/main" id="{1FEDF4E8-FFC3-6049-8DD5-8BB85CFA9C49}"/>
+                <a16:creationId xmlns:a16="http://schemas.microsoft.com/office/drawing/2014/main" id="{1B3E0567-9FB0-844E-AA76-08275B0694A7}"/>
               </a:ext>
             </a:extLst>
           </p:cNvPr>
@@ -8026,17 +8171,17 @@
           <a:p>
             <a:r>
               <a:rPr lang="en-US"/>
-              <a:t>Email </a:t>
-            </a:r>
-          </a:p>
-        </p:txBody>
-      </p:sp>
-      <p:sp>
-        <p:nvSpPr>
-          <p:cNvPr id="3" name="Content Placeholder 2">
+              <a:t>Honeypots</a:t>
+            </a:r>
+          </a:p>
+        </p:txBody>
+      </p:sp>
+      <p:sp>
+        <p:nvSpPr>
+          <p:cNvPr id="3" name="Content Placeholder 2" descr="Links to Honeypot Examples" title="Links to Honeypot Examples">
             <a:extLst>
               <a:ext uri="{FF2B5EF4-FFF2-40B4-BE49-F238E27FC236}">
-                <a16:creationId xmlns:a16="http://schemas.microsoft.com/office/drawing/2014/main" id="{164ADE41-72BC-F643-BDA1-4E0AD3639E90}"/>
+                <a16:creationId xmlns:a16="http://schemas.microsoft.com/office/drawing/2014/main" id="{ADD48C3F-32F9-DA4B-928E-139F8F8DEE21}"/>
               </a:ext>
             </a:extLst>
           </p:cNvPr>
@@ -8047,64 +8192,51 @@
             <p:ph idx="1"/>
           </p:nvPr>
         </p:nvSpPr>
-        <p:spPr/>
-        <p:txBody>
-          <a:bodyPr/>
-          <a:lstStyle/>
-          <a:p>
-            <a:r>
-              <a:rPr lang="en-US" dirty="0"/>
-              <a:t>Chain mail</a:t>
-            </a:r>
-          </a:p>
-          <a:p>
-            <a:r>
-              <a:rPr lang="en-US" dirty="0"/>
-              <a:t>Embedded links</a:t>
-            </a:r>
-          </a:p>
-          <a:p>
-            <a:r>
-              <a:rPr lang="en-US" dirty="0"/>
-              <a:t>Spam</a:t>
-            </a:r>
-          </a:p>
-          <a:p>
-            <a:r>
-              <a:rPr lang="en-US" dirty="0"/>
-              <a:t>Phishing </a:t>
-            </a:r>
-          </a:p>
-        </p:txBody>
-      </p:sp>
-      <p:pic>
-        <p:nvPicPr>
-          <p:cNvPr id="4" name="Picture 3" descr="Dr Zoidburg says your email is bad and you should feel bad" title="meme futurama"/>
-          <p:cNvPicPr>
-            <a:picLocks noChangeAspect="1"/>
-          </p:cNvPicPr>
-          <p:nvPr/>
-        </p:nvPicPr>
-        <p:blipFill>
-          <a:blip r:embed="rId2"/>
-          <a:stretch>
-            <a:fillRect/>
-          </a:stretch>
-        </p:blipFill>
         <p:spPr>
           <a:xfrm>
-            <a:off x="5348472" y="2474258"/>
-            <a:ext cx="5038725" cy="3352800"/>
+            <a:off x="1104293" y="2052918"/>
+            <a:ext cx="8946541" cy="4195481"/>
           </a:xfrm>
-          <a:prstGeom prst="rect">
-            <a:avLst/>
-          </a:prstGeom>
         </p:spPr>
-      </p:pic>
+        <p:txBody>
+          <a:bodyPr/>
+          <a:lstStyle/>
+          <a:p>
+            <a:r>
+              <a:rPr lang="en-US" dirty="0">
+                <a:hlinkClick r:id="rId2"/>
+              </a:rPr>
+              <a:t>http://www.fireeye.com/cyber-map/threat-map.html</a:t>
+            </a:r>
+            <a:endParaRPr lang="en-US" dirty="0"/>
+          </a:p>
+          <a:p>
+            <a:r>
+              <a:rPr lang="en-US" dirty="0">
+                <a:hlinkClick r:id="rId3"/>
+              </a:rPr>
+              <a:t>http://map.honeynet.org</a:t>
+            </a:r>
+            <a:endParaRPr lang="en-US" dirty="0"/>
+          </a:p>
+          <a:p>
+            <a:r>
+              <a:rPr lang="en-US" dirty="0">
+                <a:hlinkClick r:id="rId4"/>
+              </a:rPr>
+              <a:t>http://hp.ipviking.com</a:t>
+            </a:r>
+            <a:endParaRPr lang="en-US" dirty="0"/>
+          </a:p>
+          <a:p>
+            <a:endParaRPr lang="en-US" dirty="0"/>
+          </a:p>
+        </p:txBody>
+      </p:sp>
     </p:spTree>
     <p:extLst>
       <p:ext uri="{BB962C8B-B14F-4D97-AF65-F5344CB8AC3E}">
-        <p14:creationId xmlns:p14="http://schemas.microsoft.com/office/powerpoint/2010/main" val="1206667593"/>
+        <p14:creationId xmlns:p14="http://schemas.microsoft.com/office/powerpoint/2010/main" val="1398688906"/>
       </p:ext>
     </p:extLst>
   </p:cSld>
